--- a/units/unit04_procif/procif.pptx
+++ b/units/unit04_procif/procif.pptx
@@ -58,6 +58,8 @@
     <p:sldId id="336" r:id="rId66"/>
     <p:sldId id="337" r:id="rId67"/>
     <p:sldId id="338" r:id="rId68"/>
+    <p:sldId id="340" r:id="rId70"/>
+    <p:sldId id="341" r:id="rId71"/>
     <p:sldId id="339" r:id="rId69"/>
   </p:sldIdLst>
   <p:sldSz cx="12192000" cy="6858000"/>
@@ -39548,6 +39550,1865 @@
 </p:sld>
 </file>
 
+<file path=ppt/slides/slide64.xml><?xml version="1.0" encoding="utf-8"?>
+<p:sld xmlns:a="http://schemas.openxmlformats.org/drawingml/2006/main" xmlns:r="http://schemas.openxmlformats.org/officeDocument/2006/relationships" xmlns:p="http://schemas.openxmlformats.org/presentationml/2006/main">
+  <p:cSld>
+    <p:spTree>
+      <p:nvGrpSpPr>
+        <p:cNvPr id="1" name=""/>
+        <p:cNvGrpSpPr/>
+        <p:nvPr/>
+      </p:nvGrpSpPr>
+      <p:grpSpPr>
+        <a:xfrm>
+          <a:off x="0" y="0"/>
+          <a:ext cx="0" cy="0"/>
+          <a:chOff x="0" y="0"/>
+          <a:chExt cx="0" cy="0"/>
+        </a:xfrm>
+      </p:grpSpPr>
+      <p:sp>
+        <p:nvSpPr>
+          <p:cNvPr id="2" name="Title 2"/>
+          <p:cNvSpPr>
+            <a:spLocks noGrp="1"/>
+          </p:cNvSpPr>
+          <p:nvPr>
+            <p:ph type="title"/>
+          </p:nvPr>
+        </p:nvSpPr>
+        <p:spPr/>
+        <p:txBody>
+          <a:bodyPr/>
+          <a:lstStyle/>
+          <a:p>
+            <a:r>
+              <a:rPr lang="en-US" dirty="0"/>
+              <a:t>Waveflow: a Python Model First</a:t>
+            </a:r>
+          </a:p>
+        </p:txBody>
+      </p:sp>
+      <p:sp>
+        <p:nvSpPr>
+          <p:cNvPr id="3" name="TextBox 3"/>
+          <p:cNvSpPr txBox="1"/>
+          <p:nvPr/>
+        </p:nvSpPr>
+        <p:spPr>
+          <a:xfrm>
+            <a:off x="685800" y="1444752"/>
+            <a:ext cx="10698480" cy="274320"/>
+          </a:xfrm>
+          <a:prstGeom prst="rect">
+            <a:avLst/>
+          </a:prstGeom>
+          <a:noFill/>
+        </p:spPr>
+        <p:txBody>
+          <a:bodyPr wrap="square" lIns="0" tIns="0" rIns="0" bIns="0" anchor="t" rtlCol="0">
+            <a:noAutofit/>
+          </a:bodyPr>
+          <a:lstStyle/>
+          <a:p>
+            <a:r>
+              <a:rPr lang="en-US" sz="1300" dirty="0">
+                <a:solidFill>
+                  <a:srgbClr val="6E6E6E"/>
+                </a:solidFill>
+              </a:rPr>
+              <a:t>“From waveform to silicon — in Python.”  Describe the datapath once, simulate it fast and bit-exact, and generate the hardware from the same source.</a:t>
+            </a:r>
+            <a:endParaRPr lang="en-US" sz="1300" dirty="0"/>
+          </a:p>
+        </p:txBody>
+      </p:sp>
+      <p:sp>
+        <p:nvSpPr>
+          <p:cNvPr id="4" name="Shape 4"/>
+          <p:cNvSpPr/>
+          <p:nvPr/>
+        </p:nvSpPr>
+        <p:spPr>
+          <a:xfrm>
+            <a:off x="868680" y="1901952"/>
+            <a:ext cx="1874520" cy="640080"/>
+          </a:xfrm>
+          <a:prstGeom prst="roundRect">
+            <a:avLst>
+              <a:gd name="adj" fmla="val 12000"/>
+            </a:avLst>
+          </a:prstGeom>
+          <a:solidFill>
+            <a:srgbClr val="EEE6F3"/>
+          </a:solidFill>
+          <a:ln w="15875">
+            <a:solidFill>
+              <a:srgbClr val="D5C4E3"/>
+            </a:solidFill>
+          </a:ln>
+        </p:spPr>
+        <p:txBody>
+          <a:bodyPr wrap="square" lIns="73152" tIns="36576" rIns="73152" bIns="36576" anchor="ctr" rtlCol="0">
+            <a:noAutofit/>
+          </a:bodyPr>
+          <a:lstStyle/>
+          <a:p>
+            <a:pPr algn="ctr"/>
+            <a:r>
+              <a:rPr lang="en-US" sz="1300" b="1" dirty="0">
+                <a:solidFill>
+                  <a:srgbClr val="57068C"/>
+                </a:solidFill>
+              </a:rPr>
+              <a:t>HLS codegen</a:t>
+            </a:r>
+            <a:endParaRPr lang="en-US" sz="1300" dirty="0"/>
+          </a:p>
+          <a:p>
+            <a:pPr algn="ctr"/>
+            <a:r>
+              <a:rPr lang="en-US" sz="1000" dirty="0">
+                <a:solidFill>
+                  <a:srgbClr val="6E6E6E"/>
+                </a:solidFill>
+              </a:rPr>
+              <a:t>typed · generated</a:t>
+            </a:r>
+            <a:endParaRPr lang="en-US" sz="1000" dirty="0"/>
+          </a:p>
+        </p:txBody>
+      </p:sp>
+      <p:sp>
+        <p:nvSpPr>
+          <p:cNvPr id="5" name="Shape 5"/>
+          <p:cNvSpPr/>
+          <p:nvPr/>
+        </p:nvSpPr>
+        <p:spPr>
+          <a:xfrm>
+            <a:off x="3383280" y="1901952"/>
+            <a:ext cx="1874520" cy="640080"/>
+          </a:xfrm>
+          <a:prstGeom prst="roundRect">
+            <a:avLst>
+              <a:gd name="adj" fmla="val 12000"/>
+            </a:avLst>
+          </a:prstGeom>
+          <a:solidFill>
+            <a:srgbClr val="EEE6F3"/>
+          </a:solidFill>
+          <a:ln w="15875">
+            <a:solidFill>
+              <a:srgbClr val="D5C4E3"/>
+            </a:solidFill>
+          </a:ln>
+        </p:spPr>
+        <p:txBody>
+          <a:bodyPr wrap="square" lIns="73152" tIns="36576" rIns="73152" bIns="36576" anchor="ctr" rtlCol="0">
+            <a:noAutofit/>
+          </a:bodyPr>
+          <a:lstStyle/>
+          <a:p>
+            <a:pPr algn="ctr"/>
+            <a:r>
+              <a:rPr lang="en-US" sz="1300" b="1" dirty="0">
+                <a:solidFill>
+                  <a:srgbClr val="57068C"/>
+                </a:solidFill>
+              </a:rPr>
+              <a:t>RTL synth / sim</a:t>
+            </a:r>
+            <a:endParaRPr lang="en-US" sz="1300" dirty="0"/>
+          </a:p>
+          <a:p>
+            <a:pPr algn="ctr"/>
+            <a:r>
+              <a:rPr lang="en-US" sz="1000" dirty="0">
+                <a:solidFill>
+                  <a:srgbClr val="6E6E6E"/>
+                </a:solidFill>
+              </a:rPr>
+              <a:t>slow · cycle-exact</a:t>
+            </a:r>
+            <a:endParaRPr lang="en-US" sz="1000" dirty="0"/>
+          </a:p>
+        </p:txBody>
+      </p:sp>
+      <p:sp>
+        <p:nvSpPr>
+          <p:cNvPr id="6" name="Shape 6"/>
+          <p:cNvSpPr/>
+          <p:nvPr/>
+        </p:nvSpPr>
+        <p:spPr>
+          <a:xfrm>
+            <a:off x="868680" y="3090672"/>
+            <a:ext cx="1874520" cy="640080"/>
+          </a:xfrm>
+          <a:prstGeom prst="roundRect">
+            <a:avLst>
+              <a:gd name="adj" fmla="val 12000"/>
+            </a:avLst>
+          </a:prstGeom>
+          <a:solidFill>
+            <a:srgbClr val="DCEFEC"/>
+          </a:solidFill>
+          <a:ln w="15875">
+            <a:solidFill>
+              <a:srgbClr val="9FD3CC"/>
+            </a:solidFill>
+          </a:ln>
+        </p:spPr>
+        <p:txBody>
+          <a:bodyPr wrap="square" lIns="73152" tIns="36576" rIns="73152" bIns="36576" anchor="ctr" rtlCol="0">
+            <a:noAutofit/>
+          </a:bodyPr>
+          <a:lstStyle/>
+          <a:p>
+            <a:pPr algn="ctr"/>
+            <a:r>
+              <a:rPr lang="en-US" sz="1300" b="1" dirty="0">
+                <a:solidFill>
+                  <a:srgbClr val="00857C"/>
+                </a:solidFill>
+              </a:rPr>
+              <a:t>Python model</a:t>
+            </a:r>
+            <a:endParaRPr lang="en-US" sz="1300" dirty="0"/>
+          </a:p>
+          <a:p>
+            <a:pPr algn="ctr"/>
+            <a:r>
+              <a:rPr lang="en-US" sz="1000" dirty="0">
+                <a:solidFill>
+                  <a:srgbClr val="6E6E6E"/>
+                </a:solidFill>
+              </a:rPr>
+              <a:t>architecture · algorithm</a:t>
+            </a:r>
+            <a:endParaRPr lang="en-US" sz="1000" dirty="0"/>
+          </a:p>
+        </p:txBody>
+      </p:sp>
+      <p:sp>
+        <p:nvSpPr>
+          <p:cNvPr id="7" name="Shape 7"/>
+          <p:cNvSpPr/>
+          <p:nvPr/>
+        </p:nvSpPr>
+        <p:spPr>
+          <a:xfrm>
+            <a:off x="3383280" y="3090672"/>
+            <a:ext cx="1874520" cy="640080"/>
+          </a:xfrm>
+          <a:prstGeom prst="roundRect">
+            <a:avLst>
+              <a:gd name="adj" fmla="val 12000"/>
+            </a:avLst>
+          </a:prstGeom>
+          <a:solidFill>
+            <a:srgbClr val="DCEFEC"/>
+          </a:solidFill>
+          <a:ln w="15875">
+            <a:solidFill>
+              <a:srgbClr val="9FD3CC"/>
+            </a:solidFill>
+          </a:ln>
+        </p:spPr>
+        <p:txBody>
+          <a:bodyPr wrap="square" lIns="73152" tIns="36576" rIns="73152" bIns="36576" anchor="ctr" rtlCol="0">
+            <a:noAutofit/>
+          </a:bodyPr>
+          <a:lstStyle/>
+          <a:p>
+            <a:pPr algn="ctr"/>
+            <a:r>
+              <a:rPr lang="en-US" sz="1300" b="1" dirty="0">
+                <a:solidFill>
+                  <a:srgbClr val="00857C"/>
+                </a:solidFill>
+              </a:rPr>
+              <a:t>Python sim</a:t>
+            </a:r>
+            <a:endParaRPr lang="en-US" sz="1300" dirty="0"/>
+          </a:p>
+          <a:p>
+            <a:pPr algn="ctr"/>
+            <a:r>
+              <a:rPr lang="en-US" sz="1000" dirty="0">
+                <a:solidFill>
+                  <a:srgbClr val="6E6E6E"/>
+                </a:solidFill>
+              </a:rPr>
+              <a:t>fast · bit-exact</a:t>
+            </a:r>
+            <a:endParaRPr lang="en-US" sz="1000" dirty="0"/>
+          </a:p>
+        </p:txBody>
+      </p:sp>
+      <p:cxnSp>
+        <p:nvCxnSpPr>
+          <p:cNvPr id="8" name="Connector 8"/>
+          <p:cNvCxnSpPr/>
+          <p:nvPr/>
+        </p:nvCxnSpPr>
+        <p:spPr>
+          <a:xfrm flipV="1">
+            <a:off x="1805940" y="2578608"/>
+            <a:ext cx="0" cy="475488"/>
+          </a:xfrm>
+          <a:prstGeom prst="straightConnector1">
+            <a:avLst/>
+          </a:prstGeom>
+          <a:ln w="22225">
+            <a:solidFill>
+              <a:srgbClr val="57068C"/>
+            </a:solidFill>
+            <a:tailEnd type="triangle" w="med" len="med"/>
+          </a:ln>
+        </p:spPr>
+      </p:cxnSp>
+      <p:cxnSp>
+        <p:nvCxnSpPr>
+          <p:cNvPr id="9" name="Connector 9"/>
+          <p:cNvCxnSpPr/>
+          <p:nvPr/>
+        </p:nvCxnSpPr>
+        <p:spPr>
+          <a:xfrm>
+            <a:off x="2779776" y="2221992"/>
+            <a:ext cx="566928" cy="0"/>
+          </a:xfrm>
+          <a:prstGeom prst="straightConnector1">
+            <a:avLst/>
+          </a:prstGeom>
+          <a:ln w="22225">
+            <a:solidFill>
+              <a:srgbClr val="57068C"/>
+            </a:solidFill>
+            <a:tailEnd type="triangle" w="med" len="med"/>
+          </a:ln>
+        </p:spPr>
+      </p:cxnSp>
+      <p:cxnSp>
+        <p:nvCxnSpPr>
+          <p:cNvPr id="10" name="Connector 10"/>
+          <p:cNvCxnSpPr/>
+          <p:nvPr/>
+        </p:nvCxnSpPr>
+        <p:spPr>
+          <a:xfrm>
+            <a:off x="2779776" y="3410712"/>
+            <a:ext cx="566928" cy="0"/>
+          </a:xfrm>
+          <a:prstGeom prst="straightConnector1">
+            <a:avLst/>
+          </a:prstGeom>
+          <a:ln w="22225">
+            <a:solidFill>
+              <a:srgbClr val="00857C"/>
+            </a:solidFill>
+            <a:tailEnd type="triangle" w="med" len="med"/>
+          </a:ln>
+        </p:spPr>
+      </p:cxnSp>
+      <p:cxnSp>
+        <p:nvCxnSpPr>
+          <p:cNvPr id="11" name="Connector 11"/>
+          <p:cNvCxnSpPr/>
+          <p:nvPr/>
+        </p:nvCxnSpPr>
+        <p:spPr>
+          <a:xfrm>
+            <a:off x="4320540" y="3767328"/>
+            <a:ext cx="0" cy="475488"/>
+          </a:xfrm>
+          <a:prstGeom prst="straightConnector1">
+            <a:avLst/>
+          </a:prstGeom>
+          <a:ln w="22225">
+            <a:solidFill>
+              <a:srgbClr val="00857C"/>
+            </a:solidFill>
+            <a:tailEnd type="triangle" w="med" len="med"/>
+          </a:ln>
+        </p:spPr>
+      </p:cxnSp>
+      <p:sp>
+        <p:nvSpPr>
+          <p:cNvPr id="12" name="TextBox 12"/>
+          <p:cNvSpPr txBox="1"/>
+          <p:nvPr/>
+        </p:nvSpPr>
+        <p:spPr>
+          <a:xfrm>
+            <a:off x="4375404" y="3822192"/>
+            <a:ext cx="1097280" cy="237744"/>
+          </a:xfrm>
+          <a:prstGeom prst="rect">
+            <a:avLst/>
+          </a:prstGeom>
+          <a:noFill/>
+        </p:spPr>
+        <p:txBody>
+          <a:bodyPr wrap="square" lIns="0" tIns="0" rIns="0" bIns="0" anchor="t" rtlCol="0">
+            <a:noAutofit/>
+          </a:bodyPr>
+          <a:lstStyle/>
+          <a:p>
+            <a:r>
+              <a:rPr lang="en-US" sz="1000" dirty="0">
+                <a:solidFill>
+                  <a:srgbClr val="00857C"/>
+                </a:solidFill>
+              </a:rPr>
+              <a:t>fast loop</a:t>
+            </a:r>
+            <a:endParaRPr lang="en-US" sz="1000" dirty="0"/>
+          </a:p>
+        </p:txBody>
+      </p:sp>
+      <p:cxnSp>
+        <p:nvCxnSpPr>
+          <p:cNvPr id="13" name="Connector 13"/>
+          <p:cNvCxnSpPr/>
+          <p:nvPr/>
+        </p:nvCxnSpPr>
+        <p:spPr>
+          <a:xfrm>
+            <a:off x="5641848" y="2221992"/>
+            <a:ext cx="0" cy="2020824"/>
+          </a:xfrm>
+          <a:prstGeom prst="straightConnector1">
+            <a:avLst/>
+          </a:prstGeom>
+          <a:ln w="22225">
+            <a:solidFill>
+              <a:srgbClr val="2F6FA8"/>
+            </a:solidFill>
+            <a:tailEnd type="triangle" w="med" len="med"/>
+          </a:ln>
+        </p:spPr>
+      </p:cxnSp>
+      <p:sp>
+        <p:nvSpPr>
+          <p:cNvPr id="14" name="TextBox 14"/>
+          <p:cNvSpPr txBox="1"/>
+          <p:nvPr/>
+        </p:nvSpPr>
+        <p:spPr>
+          <a:xfrm>
+            <a:off x="5696712" y="2816352"/>
+            <a:ext cx="1097280" cy="237744"/>
+          </a:xfrm>
+          <a:prstGeom prst="rect">
+            <a:avLst/>
+          </a:prstGeom>
+          <a:noFill/>
+        </p:spPr>
+        <p:txBody>
+          <a:bodyPr wrap="square" lIns="0" tIns="0" rIns="0" bIns="0" anchor="t" rtlCol="0">
+            <a:noAutofit/>
+          </a:bodyPr>
+          <a:lstStyle/>
+          <a:p>
+            <a:r>
+              <a:rPr lang="en-US" sz="1000" dirty="0">
+                <a:solidFill>
+                  <a:srgbClr val="2F6FA8"/>
+                </a:solidFill>
+              </a:rPr>
+              <a:t>slow loop</a:t>
+            </a:r>
+            <a:endParaRPr lang="en-US" sz="1000" dirty="0"/>
+          </a:p>
+        </p:txBody>
+      </p:sp>
+      <p:cxnSp>
+        <p:nvCxnSpPr>
+          <p:cNvPr id="15" name="Connector 15"/>
+          <p:cNvCxnSpPr/>
+          <p:nvPr/>
+        </p:nvCxnSpPr>
+        <p:spPr>
+          <a:xfrm flipV="1">
+            <a:off x="1805940" y="3767328"/>
+            <a:ext cx="0" cy="475488"/>
+          </a:xfrm>
+          <a:prstGeom prst="straightConnector1">
+            <a:avLst/>
+          </a:prstGeom>
+          <a:ln w="22225">
+            <a:solidFill>
+              <a:srgbClr val="00857C"/>
+            </a:solidFill>
+            <a:tailEnd type="triangle" w="med" len="med"/>
+          </a:ln>
+        </p:spPr>
+      </p:cxnSp>
+      <p:sp>
+        <p:nvSpPr>
+          <p:cNvPr id="16" name="Shape 16"/>
+          <p:cNvSpPr/>
+          <p:nvPr/>
+        </p:nvSpPr>
+        <p:spPr>
+          <a:xfrm>
+            <a:off x="868680" y="4279392"/>
+            <a:ext cx="4974336" cy="420624"/>
+          </a:xfrm>
+          <a:prstGeom prst="roundRect">
+            <a:avLst>
+              <a:gd name="adj" fmla="val 30000"/>
+            </a:avLst>
+          </a:prstGeom>
+          <a:solidFill>
+            <a:srgbClr val="EAF0F7"/>
+          </a:solidFill>
+          <a:ln w="12700">
+            <a:solidFill>
+              <a:srgbClr val="B9CCE0"/>
+            </a:solidFill>
+          </a:ln>
+        </p:spPr>
+        <p:txBody>
+          <a:bodyPr wrap="square" lIns="73152" tIns="36576" rIns="73152" bIns="36576" anchor="ctr" rtlCol="0">
+            <a:noAutofit/>
+          </a:bodyPr>
+          <a:lstStyle/>
+          <a:p>
+            <a:pPr algn="ctr"/>
+            <a:r>
+              <a:rPr lang="en-US" sz="1200" b="1" dirty="0">
+                <a:solidFill>
+                  <a:srgbClr val="262626"/>
+                </a:solidFill>
+              </a:rPr>
+              <a:t>design · verify · calibrate · iterate</a:t>
+            </a:r>
+            <a:endParaRPr lang="en-US" sz="1200" dirty="0"/>
+          </a:p>
+        </p:txBody>
+      </p:sp>
+      <p:sp>
+        <p:nvSpPr>
+          <p:cNvPr id="17" name="TextBox 17"/>
+          <p:cNvSpPr txBox="1"/>
+          <p:nvPr/>
+        </p:nvSpPr>
+        <p:spPr>
+          <a:xfrm>
+            <a:off x="6720840" y="1847088"/>
+            <a:ext cx="4663440" cy="274320"/>
+          </a:xfrm>
+          <a:prstGeom prst="rect">
+            <a:avLst/>
+          </a:prstGeom>
+          <a:noFill/>
+        </p:spPr>
+        <p:txBody>
+          <a:bodyPr wrap="square" lIns="0" tIns="0" rIns="0" bIns="0" anchor="t" rtlCol="0">
+            <a:noAutofit/>
+          </a:bodyPr>
+          <a:lstStyle/>
+          <a:p>
+            <a:r>
+              <a:rPr lang="en-US" sz="1100" b="1" dirty="0">
+                <a:solidFill>
+                  <a:srgbClr val="6E6E6E"/>
+                </a:solidFill>
+              </a:rPr>
+              <a:t>THE FLOW, FOR THIS SAME IP</a:t>
+            </a:r>
+            <a:endParaRPr lang="en-US" sz="1100" dirty="0"/>
+          </a:p>
+        </p:txBody>
+      </p:sp>
+      <p:sp>
+        <p:nvSpPr>
+          <p:cNvPr id="18" name="Shape 18"/>
+          <p:cNvSpPr/>
+          <p:nvPr/>
+        </p:nvSpPr>
+        <p:spPr>
+          <a:xfrm>
+            <a:off x="6720840" y="2176272"/>
+            <a:ext cx="310896" cy="310896"/>
+          </a:xfrm>
+          <a:prstGeom prst="ellipse">
+            <a:avLst/>
+          </a:prstGeom>
+          <a:solidFill>
+            <a:srgbClr val="57068C"/>
+          </a:solidFill>
+          <a:ln>
+            <a:noFill/>
+          </a:ln>
+        </p:spPr>
+        <p:txBody>
+          <a:bodyPr wrap="square" lIns="73152" tIns="36576" rIns="73152" bIns="36576" anchor="ctr" rtlCol="0">
+            <a:noAutofit/>
+          </a:bodyPr>
+          <a:lstStyle/>
+          <a:p>
+            <a:pPr algn="ctr"/>
+            <a:r>
+              <a:rPr lang="en-US" sz="1100" b="1" dirty="0">
+                <a:solidFill>
+                  <a:srgbClr val="FFFFFF"/>
+                </a:solidFill>
+              </a:rPr>
+              <a:t>1</a:t>
+            </a:r>
+            <a:endParaRPr lang="en-US" sz="1100" dirty="0"/>
+          </a:p>
+        </p:txBody>
+      </p:sp>
+      <p:sp>
+        <p:nvSpPr>
+          <p:cNvPr id="19" name="TextBox 19"/>
+          <p:cNvSpPr txBox="1"/>
+          <p:nvPr/>
+        </p:nvSpPr>
+        <p:spPr>
+          <a:xfrm>
+            <a:off x="7150608" y="2139696"/>
+            <a:ext cx="4206240" cy="548640"/>
+          </a:xfrm>
+          <a:prstGeom prst="rect">
+            <a:avLst/>
+          </a:prstGeom>
+          <a:noFill/>
+        </p:spPr>
+        <p:txBody>
+          <a:bodyPr wrap="square" lIns="0" tIns="0" rIns="0" bIns="0" anchor="t" rtlCol="0">
+            <a:noAutofit/>
+          </a:bodyPr>
+          <a:lstStyle/>
+          <a:p>
+            <a:r>
+              <a:rPr lang="en-US" sz="1300" b="1" dirty="0">
+                <a:solidFill>
+                  <a:srgbClr val="262626"/>
+                </a:solidFill>
+              </a:rPr>
+              <a:t>Model it in Python</a:t>
+            </a:r>
+            <a:endParaRPr lang="en-US" sz="1300" dirty="0"/>
+          </a:p>
+          <a:p>
+            <a:r>
+              <a:rPr lang="en-US" sz="1100" dirty="0">
+                <a:solidFill>
+                  <a:srgbClr val="6E6E6E"/>
+                </a:solidFill>
+              </a:rPr>
+              <a:t xml:space="preserve">the kernel, and its registers as a </a:t>
+            </a:r>
+            <a:r>
+              <a:rPr lang="en-US" sz="1100" dirty="0">
+                <a:solidFill>
+                  <a:srgbClr val="330662"/>
+                </a:solidFill>
+                <a:latin typeface="Consolas"/>
+                <a:cs typeface="Consolas"/>
+              </a:rPr>
+              <a:t>VitisRegMap</a:t>
+            </a:r>
+            <a:endParaRPr lang="en-US" sz="1100" dirty="0"/>
+          </a:p>
+        </p:txBody>
+      </p:sp>
+      <p:sp>
+        <p:nvSpPr>
+          <p:cNvPr id="20" name="Shape 20"/>
+          <p:cNvSpPr/>
+          <p:nvPr/>
+        </p:nvSpPr>
+        <p:spPr>
+          <a:xfrm>
+            <a:off x="6720840" y="2743200"/>
+            <a:ext cx="310896" cy="310896"/>
+          </a:xfrm>
+          <a:prstGeom prst="ellipse">
+            <a:avLst/>
+          </a:prstGeom>
+          <a:solidFill>
+            <a:srgbClr val="57068C"/>
+          </a:solidFill>
+          <a:ln>
+            <a:noFill/>
+          </a:ln>
+        </p:spPr>
+        <p:txBody>
+          <a:bodyPr wrap="square" lIns="73152" tIns="36576" rIns="73152" bIns="36576" anchor="ctr" rtlCol="0">
+            <a:noAutofit/>
+          </a:bodyPr>
+          <a:lstStyle/>
+          <a:p>
+            <a:pPr algn="ctr"/>
+            <a:r>
+              <a:rPr lang="en-US" sz="1100" b="1" dirty="0">
+                <a:solidFill>
+                  <a:srgbClr val="FFFFFF"/>
+                </a:solidFill>
+              </a:rPr>
+              <a:t>2</a:t>
+            </a:r>
+            <a:endParaRPr lang="en-US" sz="1100" dirty="0"/>
+          </a:p>
+        </p:txBody>
+      </p:sp>
+      <p:sp>
+        <p:nvSpPr>
+          <p:cNvPr id="21" name="TextBox 21"/>
+          <p:cNvSpPr txBox="1"/>
+          <p:nvPr/>
+        </p:nvSpPr>
+        <p:spPr>
+          <a:xfrm>
+            <a:off x="7150608" y="2706624"/>
+            <a:ext cx="4206240" cy="548640"/>
+          </a:xfrm>
+          <a:prstGeom prst="rect">
+            <a:avLst/>
+          </a:prstGeom>
+          <a:noFill/>
+        </p:spPr>
+        <p:txBody>
+          <a:bodyPr wrap="square" lIns="0" tIns="0" rIns="0" bIns="0" anchor="t" rtlCol="0">
+            <a:noAutofit/>
+          </a:bodyPr>
+          <a:lstStyle/>
+          <a:p>
+            <a:r>
+              <a:rPr lang="en-US" sz="1300" b="1" dirty="0">
+                <a:solidFill>
+                  <a:srgbClr val="262626"/>
+                </a:solidFill>
+              </a:rPr>
+              <a:t>Simulate in Python</a:t>
+            </a:r>
+            <a:endParaRPr lang="en-US" sz="1300" dirty="0"/>
+          </a:p>
+          <a:p>
+            <a:r>
+              <a:rPr lang="en-US" sz="1100" dirty="0">
+                <a:solidFill>
+                  <a:srgbClr val="6E6E6E"/>
+                </a:solidFill>
+              </a:rPr>
+              <a:t xml:space="preserve">function, and </a:t>
+            </a:r>
+            <a:r>
+              <a:rPr lang="en-US" sz="1100" b="1" dirty="0">
+                <a:solidFill>
+                  <a:srgbClr val="6E6E6E"/>
+                </a:solidFill>
+              </a:rPr>
+              <a:t>cycle-approximate</a:t>
+            </a:r>
+            <a:r>
+              <a:rPr lang="en-US" sz="1100" dirty="0">
+                <a:solidFill>
+                  <a:srgbClr val="6E6E6E"/>
+                </a:solidFill>
+              </a:rPr>
+              <a:t xml:space="preserve"> timing</a:t>
+            </a:r>
+            <a:endParaRPr lang="en-US" sz="1100" dirty="0"/>
+          </a:p>
+        </p:txBody>
+      </p:sp>
+      <p:sp>
+        <p:nvSpPr>
+          <p:cNvPr id="22" name="Shape 22"/>
+          <p:cNvSpPr/>
+          <p:nvPr/>
+        </p:nvSpPr>
+        <p:spPr>
+          <a:xfrm>
+            <a:off x="6720840" y="3310128"/>
+            <a:ext cx="310896" cy="310896"/>
+          </a:xfrm>
+          <a:prstGeom prst="ellipse">
+            <a:avLst/>
+          </a:prstGeom>
+          <a:solidFill>
+            <a:srgbClr val="57068C"/>
+          </a:solidFill>
+          <a:ln>
+            <a:noFill/>
+          </a:ln>
+        </p:spPr>
+        <p:txBody>
+          <a:bodyPr wrap="square" lIns="73152" tIns="36576" rIns="73152" bIns="36576" anchor="ctr" rtlCol="0">
+            <a:noAutofit/>
+          </a:bodyPr>
+          <a:lstStyle/>
+          <a:p>
+            <a:pPr algn="ctr"/>
+            <a:r>
+              <a:rPr lang="en-US" sz="1100" b="1" dirty="0">
+                <a:solidFill>
+                  <a:srgbClr val="FFFFFF"/>
+                </a:solidFill>
+              </a:rPr>
+              <a:t>3</a:t>
+            </a:r>
+            <a:endParaRPr lang="en-US" sz="1100" dirty="0"/>
+          </a:p>
+        </p:txBody>
+      </p:sp>
+      <p:sp>
+        <p:nvSpPr>
+          <p:cNvPr id="23" name="TextBox 23"/>
+          <p:cNvSpPr txBox="1"/>
+          <p:nvPr/>
+        </p:nvSpPr>
+        <p:spPr>
+          <a:xfrm>
+            <a:off x="7150608" y="3273552"/>
+            <a:ext cx="4206240" cy="548640"/>
+          </a:xfrm>
+          <a:prstGeom prst="rect">
+            <a:avLst/>
+          </a:prstGeom>
+          <a:noFill/>
+        </p:spPr>
+        <p:txBody>
+          <a:bodyPr wrap="square" lIns="0" tIns="0" rIns="0" bIns="0" anchor="t" rtlCol="0">
+            <a:noAutofit/>
+          </a:bodyPr>
+          <a:lstStyle/>
+          <a:p>
+            <a:r>
+              <a:rPr lang="en-US" sz="1300" b="1" dirty="0">
+                <a:solidFill>
+                  <a:srgbClr val="262626"/>
+                </a:solidFill>
+              </a:rPr>
+              <a:t>Generate the Vitis C++</a:t>
+            </a:r>
+            <a:endParaRPr lang="en-US" sz="1300" dirty="0"/>
+          </a:p>
+          <a:p>
+            <a:r>
+              <a:rPr lang="en-US" sz="1100" dirty="0">
+                <a:solidFill>
+                  <a:srgbClr val="6E6E6E"/>
+                </a:solidFill>
+              </a:rPr>
+              <a:t>kernel and testbench; you keep the compute hook</a:t>
+            </a:r>
+            <a:endParaRPr lang="en-US" sz="1100" dirty="0"/>
+          </a:p>
+        </p:txBody>
+      </p:sp>
+      <p:sp>
+        <p:nvSpPr>
+          <p:cNvPr id="24" name="Shape 24"/>
+          <p:cNvSpPr/>
+          <p:nvPr/>
+        </p:nvSpPr>
+        <p:spPr>
+          <a:xfrm>
+            <a:off x="6720840" y="3877056"/>
+            <a:ext cx="310896" cy="310896"/>
+          </a:xfrm>
+          <a:prstGeom prst="ellipse">
+            <a:avLst/>
+          </a:prstGeom>
+          <a:solidFill>
+            <a:srgbClr val="57068C"/>
+          </a:solidFill>
+          <a:ln>
+            <a:noFill/>
+          </a:ln>
+        </p:spPr>
+        <p:txBody>
+          <a:bodyPr wrap="square" lIns="73152" tIns="36576" rIns="73152" bIns="36576" anchor="ctr" rtlCol="0">
+            <a:noAutofit/>
+          </a:bodyPr>
+          <a:lstStyle/>
+          <a:p>
+            <a:pPr algn="ctr"/>
+            <a:r>
+              <a:rPr lang="en-US" sz="1100" b="1" dirty="0">
+                <a:solidFill>
+                  <a:srgbClr val="FFFFFF"/>
+                </a:solidFill>
+              </a:rPr>
+              <a:t>4</a:t>
+            </a:r>
+            <a:endParaRPr lang="en-US" sz="1100" dirty="0"/>
+          </a:p>
+        </p:txBody>
+      </p:sp>
+      <p:sp>
+        <p:nvSpPr>
+          <p:cNvPr id="25" name="TextBox 25"/>
+          <p:cNvSpPr txBox="1"/>
+          <p:nvPr/>
+        </p:nvSpPr>
+        <p:spPr>
+          <a:xfrm>
+            <a:off x="7150608" y="3840480"/>
+            <a:ext cx="4206240" cy="548640"/>
+          </a:xfrm>
+          <a:prstGeom prst="rect">
+            <a:avLst/>
+          </a:prstGeom>
+          <a:noFill/>
+        </p:spPr>
+        <p:txBody>
+          <a:bodyPr wrap="square" lIns="0" tIns="0" rIns="0" bIns="0" anchor="t" rtlCol="0">
+            <a:noAutofit/>
+          </a:bodyPr>
+          <a:lstStyle/>
+          <a:p>
+            <a:r>
+              <a:rPr lang="en-US" sz="1300" b="1" dirty="0">
+                <a:solidFill>
+                  <a:srgbClr val="262626"/>
+                </a:solidFill>
+              </a:rPr>
+              <a:t xml:space="preserve">C-simulation checks </a:t>
+            </a:r>
+            <a:r>
+              <a:rPr lang="en-US" sz="1300" b="1" dirty="0">
+                <a:solidFill>
+                  <a:srgbClr val="262626"/>
+                </a:solidFill>
+              </a:rPr>
+              <a:t>function</a:t>
+            </a:r>
+            <a:endParaRPr lang="en-US" sz="1300" dirty="0"/>
+          </a:p>
+          <a:p>
+            <a:r>
+              <a:rPr lang="en-US" sz="1100" dirty="0">
+                <a:solidFill>
+                  <a:srgbClr val="6E6E6E"/>
+                </a:solidFill>
+              </a:rPr>
+              <a:t>against the Python result</a:t>
+            </a:r>
+            <a:endParaRPr lang="en-US" sz="1100" dirty="0"/>
+          </a:p>
+        </p:txBody>
+      </p:sp>
+      <p:sp>
+        <p:nvSpPr>
+          <p:cNvPr id="26" name="Shape 26"/>
+          <p:cNvSpPr/>
+          <p:nvPr/>
+        </p:nvSpPr>
+        <p:spPr>
+          <a:xfrm>
+            <a:off x="6720840" y="4443984"/>
+            <a:ext cx="310896" cy="310896"/>
+          </a:xfrm>
+          <a:prstGeom prst="ellipse">
+            <a:avLst/>
+          </a:prstGeom>
+          <a:solidFill>
+            <a:srgbClr val="57068C"/>
+          </a:solidFill>
+          <a:ln>
+            <a:noFill/>
+          </a:ln>
+        </p:spPr>
+        <p:txBody>
+          <a:bodyPr wrap="square" lIns="73152" tIns="36576" rIns="73152" bIns="36576" anchor="ctr" rtlCol="0">
+            <a:noAutofit/>
+          </a:bodyPr>
+          <a:lstStyle/>
+          <a:p>
+            <a:pPr algn="ctr"/>
+            <a:r>
+              <a:rPr lang="en-US" sz="1100" b="1" dirty="0">
+                <a:solidFill>
+                  <a:srgbClr val="FFFFFF"/>
+                </a:solidFill>
+              </a:rPr>
+              <a:t>5</a:t>
+            </a:r>
+            <a:endParaRPr lang="en-US" sz="1100" dirty="0"/>
+          </a:p>
+        </p:txBody>
+      </p:sp>
+      <p:sp>
+        <p:nvSpPr>
+          <p:cNvPr id="27" name="TextBox 27"/>
+          <p:cNvSpPr txBox="1"/>
+          <p:nvPr/>
+        </p:nvSpPr>
+        <p:spPr>
+          <a:xfrm>
+            <a:off x="7150608" y="4407408"/>
+            <a:ext cx="4206240" cy="548640"/>
+          </a:xfrm>
+          <a:prstGeom prst="rect">
+            <a:avLst/>
+          </a:prstGeom>
+          <a:noFill/>
+        </p:spPr>
+        <p:txBody>
+          <a:bodyPr wrap="square" lIns="0" tIns="0" rIns="0" bIns="0" anchor="t" rtlCol="0">
+            <a:noAutofit/>
+          </a:bodyPr>
+          <a:lstStyle/>
+          <a:p>
+            <a:r>
+              <a:rPr lang="en-US" sz="1300" b="1" dirty="0">
+                <a:solidFill>
+                  <a:srgbClr val="262626"/>
+                </a:solidFill>
+              </a:rPr>
+              <a:t xml:space="preserve">Co-simulation checks </a:t>
+            </a:r>
+            <a:r>
+              <a:rPr lang="en-US" sz="1300" b="1" dirty="0">
+                <a:solidFill>
+                  <a:srgbClr val="262626"/>
+                </a:solidFill>
+              </a:rPr>
+              <a:t>timing</a:t>
+            </a:r>
+            <a:endParaRPr lang="en-US" sz="1300" dirty="0"/>
+          </a:p>
+          <a:p>
+            <a:r>
+              <a:rPr lang="en-US" sz="1100" dirty="0">
+                <a:solidFill>
+                  <a:srgbClr val="6E6E6E"/>
+                </a:solidFill>
+              </a:rPr>
+              <a:t>against the Python estimate</a:t>
+            </a:r>
+            <a:endParaRPr lang="en-US" sz="1100" dirty="0"/>
+          </a:p>
+        </p:txBody>
+      </p:sp>
+      <p:sp>
+        <p:nvSpPr>
+          <p:cNvPr id="28" name="Shape 28"/>
+          <p:cNvSpPr/>
+          <p:nvPr/>
+        </p:nvSpPr>
+        <p:spPr>
+          <a:xfrm>
+            <a:off x="685800" y="5230368"/>
+            <a:ext cx="10698480" cy="566928"/>
+          </a:xfrm>
+          <a:prstGeom prst="rect">
+            <a:avLst/>
+          </a:prstGeom>
+          <a:solidFill>
+            <a:srgbClr val="DCEFEC"/>
+          </a:solidFill>
+          <a:ln w="12700">
+            <a:solidFill>
+              <a:srgbClr val="9FD3CC"/>
+            </a:solidFill>
+          </a:ln>
+        </p:spPr>
+        <p:txBody>
+          <a:bodyPr wrap="square" lIns="73152" tIns="36576" rIns="73152" bIns="36576" anchor="ctr" rtlCol="0">
+            <a:noAutofit/>
+          </a:bodyPr>
+          <a:lstStyle/>
+          <a:p>
+            <a:pPr algn="ctr"/>
+            <a:r>
+              <a:rPr lang="en-US" sz="1400" dirty="0">
+                <a:solidFill>
+                  <a:srgbClr val="262626"/>
+                </a:solidFill>
+              </a:rPr>
+              <a:t xml:space="preserve">You have already run part of it: </a:t>
+            </a:r>
+            <a:r>
+              <a:rPr lang="en-US" sz="1400" dirty="0">
+                <a:solidFill>
+                  <a:srgbClr val="330662"/>
+                </a:solidFill>
+                <a:latin typeface="Consolas"/>
+                <a:cs typeface="Consolas"/>
+              </a:rPr>
+              <a:t>scalar_fun_build.py</a:t>
+            </a:r>
+            <a:r>
+              <a:rPr lang="en-US" sz="1400" dirty="0">
+                <a:solidFill>
+                  <a:srgbClr val="262626"/>
+                </a:solidFill>
+              </a:rPr>
+              <a:t xml:space="preserve"> </a:t>
+            </a:r>
+            <a:r>
+              <a:rPr lang="en-US" sz="1400" b="1" dirty="0">
+                <a:solidFill>
+                  <a:srgbClr val="262626"/>
+                </a:solidFill>
+              </a:rPr>
+              <a:t>is</a:t>
+            </a:r>
+            <a:r>
+              <a:rPr lang="en-US" sz="1400" dirty="0">
+                <a:solidFill>
+                  <a:srgbClr val="262626"/>
+                </a:solidFill>
+              </a:rPr>
+              <a:t xml:space="preserve"> a Waveflow build graph.  What is new above is the modelling layer.</a:t>
+            </a:r>
+            <a:endParaRPr lang="en-US" sz="1400" dirty="0"/>
+          </a:p>
+        </p:txBody>
+      </p:sp>
+      <p:sp>
+        <p:nvSpPr>
+          <p:cNvPr id="29" name="Slide Number Placeholder 29"/>
+          <p:cNvSpPr>
+            <a:spLocks noGrp="1"/>
+          </p:cNvSpPr>
+          <p:nvPr>
+            <p:ph type="sldNum" sz="quarter" idx="12"/>
+          </p:nvPr>
+        </p:nvSpPr>
+        <p:spPr/>
+        <p:txBody>
+          <a:bodyPr/>
+          <a:lstStyle/>
+          <a:p>
+            <a:fld id="{629637A9-119A-49DA-BD12-AAC58B377D80}" type="slidenum">
+              <a:rPr lang="en-US" smtClean="0"/>
+              <a:t>‹#›</a:t>
+            </a:fld>
+            <a:endParaRPr lang="en-US" dirty="0"/>
+          </a:p>
+        </p:txBody>
+      </p:sp>
+    </p:spTree>
+  </p:cSld>
+  <p:clrMapOvr>
+    <a:masterClrMapping/>
+  </p:clrMapOvr>
+</p:sld>
+</file>
+
+<file path=ppt/slides/slide65.xml><?xml version="1.0" encoding="utf-8"?>
+<p:sld xmlns:a="http://schemas.openxmlformats.org/drawingml/2006/main" xmlns:r="http://schemas.openxmlformats.org/officeDocument/2006/relationships" xmlns:p="http://schemas.openxmlformats.org/presentationml/2006/main">
+  <p:cSld>
+    <p:spTree>
+      <p:nvGrpSpPr>
+        <p:cNvPr id="1" name=""/>
+        <p:cNvGrpSpPr/>
+        <p:nvPr/>
+      </p:nvGrpSpPr>
+      <p:grpSpPr>
+        <a:xfrm>
+          <a:off x="0" y="0"/>
+          <a:ext cx="0" cy="0"/>
+          <a:chOff x="0" y="0"/>
+          <a:chExt cx="0" cy="0"/>
+        </a:xfrm>
+      </p:grpSpPr>
+      <p:sp>
+        <p:nvSpPr>
+          <p:cNvPr id="2" name="Title 2"/>
+          <p:cNvSpPr>
+            <a:spLocks noGrp="1"/>
+          </p:cNvSpPr>
+          <p:nvPr>
+            <p:ph type="title"/>
+          </p:nvPr>
+        </p:nvSpPr>
+        <p:spPr/>
+        <p:txBody>
+          <a:bodyPr/>
+          <a:lstStyle/>
+          <a:p>
+            <a:r>
+              <a:rPr lang="en-US" dirty="0"/>
+              <a:t>Waveflow vs. Native Vitis</a:t>
+            </a:r>
+          </a:p>
+        </p:txBody>
+      </p:sp>
+      <p:sp>
+        <p:nvSpPr>
+          <p:cNvPr id="3" name="Shape 3"/>
+          <p:cNvSpPr/>
+          <p:nvPr/>
+        </p:nvSpPr>
+        <p:spPr>
+          <a:xfrm>
+            <a:off x="685800" y="1517904"/>
+            <a:ext cx="5212080" cy="512064"/>
+          </a:xfrm>
+          <a:prstGeom prst="roundRect">
+            <a:avLst>
+              <a:gd name="adj" fmla="val 14000"/>
+            </a:avLst>
+          </a:prstGeom>
+          <a:solidFill>
+            <a:srgbClr val="B4530F"/>
+          </a:solidFill>
+          <a:ln>
+            <a:noFill/>
+          </a:ln>
+        </p:spPr>
+        <p:txBody>
+          <a:bodyPr wrap="square" lIns="73152" tIns="36576" rIns="73152" bIns="36576" anchor="ctr" rtlCol="0">
+            <a:noAutofit/>
+          </a:bodyPr>
+          <a:lstStyle/>
+          <a:p>
+            <a:pPr algn="ctr"/>
+            <a:r>
+              <a:rPr lang="en-US" sz="1700" b="1" dirty="0">
+                <a:solidFill>
+                  <a:srgbClr val="FFFFFF"/>
+                </a:solidFill>
+              </a:rPr>
+              <a:t>What it costs</a:t>
+            </a:r>
+            <a:endParaRPr lang="en-US" sz="1700" dirty="0"/>
+          </a:p>
+        </p:txBody>
+      </p:sp>
+      <p:sp>
+        <p:nvSpPr>
+          <p:cNvPr id="4" name="Shape 4"/>
+          <p:cNvSpPr/>
+          <p:nvPr/>
+        </p:nvSpPr>
+        <p:spPr>
+          <a:xfrm>
+            <a:off x="685800" y="2029968"/>
+            <a:ext cx="5212080" cy="3017520"/>
+          </a:xfrm>
+          <a:prstGeom prst="rect">
+            <a:avLst/>
+          </a:prstGeom>
+          <a:solidFill>
+            <a:srgbClr val="FCEEE3"/>
+          </a:solidFill>
+          <a:ln w="12700">
+            <a:solidFill>
+              <a:srgbClr val="E7C3A6"/>
+            </a:solidFill>
+          </a:ln>
+        </p:spPr>
+        <p:txBody>
+          <a:bodyPr wrap="square" lIns="73152" tIns="36576" rIns="73152" bIns="36576" anchor="ctr" rtlCol="0">
+            <a:noAutofit/>
+          </a:bodyPr>
+          <a:lstStyle/>
+          <a:p>
+            <a:r>
+              <a:rPr lang="en-US" sz="1000" dirty="0"/>
+              <a:t/>
+            </a:r>
+            <a:endParaRPr lang="en-US" sz="1000" dirty="0"/>
+          </a:p>
+        </p:txBody>
+      </p:sp>
+      <p:sp>
+        <p:nvSpPr>
+          <p:cNvPr id="5" name="TextBox 5"/>
+          <p:cNvSpPr txBox="1"/>
+          <p:nvPr/>
+        </p:nvSpPr>
+        <p:spPr>
+          <a:xfrm>
+            <a:off x="996696" y="2212848"/>
+            <a:ext cx="4590288" cy="2651760"/>
+          </a:xfrm>
+          <a:prstGeom prst="rect">
+            <a:avLst/>
+          </a:prstGeom>
+          <a:noFill/>
+        </p:spPr>
+        <p:txBody>
+          <a:bodyPr wrap="square" lIns="0" tIns="0" rIns="0" bIns="0" anchor="t" rtlCol="0">
+            <a:noAutofit/>
+          </a:bodyPr>
+          <a:lstStyle/>
+          <a:p>
+            <a:pPr marL="237744" indent="-237744">
+              <a:spcBef>
+                <a:spcPts val="0"/>
+              </a:spcBef>
+              <a:buClr>
+                <a:srgbClr val="B4530F"/>
+              </a:buClr>
+              <a:buSzPct val="70000"/>
+              <a:buFont typeface="Arial"/>
+              <a:buChar char="▪"/>
+            </a:pPr>
+            <a:r>
+              <a:rPr lang="en-US" sz="1400" dirty="0">
+                <a:solidFill>
+                  <a:srgbClr val="262626"/>
+                </a:solidFill>
+              </a:rPr>
+              <a:t xml:space="preserve">A </a:t>
+            </a:r>
+            <a:r>
+              <a:rPr lang="en-US" sz="1400" b="1" dirty="0">
+                <a:solidFill>
+                  <a:srgbClr val="262626"/>
+                </a:solidFill>
+              </a:rPr>
+              <a:t>Python layer</a:t>
+            </a:r>
+            <a:r>
+              <a:rPr lang="en-US" sz="1400" dirty="0">
+                <a:solidFill>
+                  <a:srgbClr val="262626"/>
+                </a:solidFill>
+              </a:rPr>
+              <a:t xml:space="preserve"> between you and the tool — one more thing to learn, and to debug</a:t>
+            </a:r>
+            <a:endParaRPr lang="en-US" sz="1400" dirty="0"/>
+          </a:p>
+          <a:p>
+            <a:pPr marL="237744" indent="-237744">
+              <a:spcBef>
+                <a:spcPts val="600"/>
+              </a:spcBef>
+              <a:buClr>
+                <a:srgbClr val="B4530F"/>
+              </a:buClr>
+              <a:buSzPct val="70000"/>
+              <a:buFont typeface="Arial"/>
+              <a:buChar char="▪"/>
+            </a:pPr>
+            <a:r>
+              <a:rPr lang="en-US" sz="1400" dirty="0">
+                <a:solidFill>
+                  <a:srgbClr val="262626"/>
+                </a:solidFill>
+              </a:rPr>
+              <a:t xml:space="preserve">Its own vocabulary — </a:t>
+            </a:r>
+            <a:r>
+              <a:rPr lang="en-US" sz="1400" dirty="0">
+                <a:solidFill>
+                  <a:srgbClr val="330662"/>
+                </a:solidFill>
+                <a:latin typeface="Consolas"/>
+                <a:cs typeface="Consolas"/>
+              </a:rPr>
+              <a:t>VitisRegMap</a:t>
+            </a:r>
+            <a:r>
+              <a:rPr lang="en-US" sz="1400" dirty="0">
+                <a:solidFill>
+                  <a:srgbClr val="262626"/>
+                </a:solidFill>
+              </a:rPr>
+              <a:t xml:space="preserve">, </a:t>
+            </a:r>
+            <a:r>
+              <a:rPr lang="en-US" sz="1400" dirty="0">
+                <a:solidFill>
+                  <a:srgbClr val="330662"/>
+                </a:solidFill>
+                <a:latin typeface="Consolas"/>
+                <a:cs typeface="Consolas"/>
+              </a:rPr>
+              <a:t>HostActivated</a:t>
+            </a:r>
+            <a:r>
+              <a:rPr lang="en-US" sz="1400" dirty="0">
+                <a:solidFill>
+                  <a:srgbClr val="262626"/>
+                </a:solidFill>
+              </a:rPr>
+              <a:t xml:space="preserve">, </a:t>
+            </a:r>
+            <a:r>
+              <a:rPr lang="en-US" sz="1400" dirty="0">
+                <a:solidFill>
+                  <a:srgbClr val="330662"/>
+                </a:solidFill>
+                <a:latin typeface="Consolas"/>
+                <a:cs typeface="Consolas"/>
+              </a:rPr>
+              <a:t>SeqTB</a:t>
+            </a:r>
+            <a:r>
+              <a:rPr lang="en-US" sz="1400" dirty="0">
+                <a:solidFill>
+                  <a:srgbClr val="262626"/>
+                </a:solidFill>
+              </a:rPr>
+              <a:t xml:space="preserve"> — before you see any hardware</a:t>
+            </a:r>
+            <a:endParaRPr lang="en-US" sz="1400" dirty="0"/>
+          </a:p>
+          <a:p>
+            <a:pPr marL="237744" indent="-237744">
+              <a:spcBef>
+                <a:spcPts val="600"/>
+              </a:spcBef>
+              <a:buClr>
+                <a:srgbClr val="B4530F"/>
+              </a:buClr>
+              <a:buSzPct val="70000"/>
+              <a:buFont typeface="Arial"/>
+              <a:buChar char="▪"/>
+            </a:pPr>
+            <a:r>
+              <a:rPr lang="en-US" sz="1400" b="1" dirty="0">
+                <a:solidFill>
+                  <a:srgbClr val="262626"/>
+                </a:solidFill>
+              </a:rPr>
+              <a:t>Early-stage research software</a:t>
+            </a:r>
+            <a:r>
+              <a:rPr lang="en-US" sz="1400" dirty="0">
+                <a:solidFill>
+                  <a:srgbClr val="262626"/>
+                </a:solidFill>
+              </a:rPr>
+              <a:t>, by its own description</a:t>
+            </a:r>
+            <a:endParaRPr lang="en-US" sz="1400" dirty="0"/>
+          </a:p>
+          <a:p>
+            <a:pPr marL="237744" indent="-237744">
+              <a:spcBef>
+                <a:spcPts val="600"/>
+              </a:spcBef>
+              <a:buClr>
+                <a:srgbClr val="B4530F"/>
+              </a:buClr>
+              <a:buSzPct val="70000"/>
+              <a:buFont typeface="Arial"/>
+              <a:buChar char="▪"/>
+            </a:pPr>
+            <a:r>
+              <a:rPr lang="en-US" sz="1400" dirty="0">
+                <a:solidFill>
+                  <a:srgbClr val="262626"/>
+                </a:solidFill>
+              </a:rPr>
+              <a:t xml:space="preserve">Only the </a:t>
+            </a:r>
+            <a:r>
+              <a:rPr lang="en-US" sz="1400" b="1" dirty="0">
+                <a:solidFill>
+                  <a:srgbClr val="262626"/>
+                </a:solidFill>
+              </a:rPr>
+              <a:t>sequential</a:t>
+            </a:r>
+            <a:r>
+              <a:rPr lang="en-US" sz="1400" dirty="0">
+                <a:solidFill>
+                  <a:srgbClr val="262626"/>
+                </a:solidFill>
+              </a:rPr>
+              <a:t xml:space="preserve"> testbench lowers to Vitis: a C++ testbench is one straight-line </a:t>
+            </a:r>
+            <a:r>
+              <a:rPr lang="en-US" sz="1400" dirty="0">
+                <a:solidFill>
+                  <a:srgbClr val="330662"/>
+                </a:solidFill>
+                <a:latin typeface="Consolas"/>
+                <a:cs typeface="Consolas"/>
+              </a:rPr>
+              <a:t>main()</a:t>
+            </a:r>
+            <a:r>
+              <a:rPr lang="en-US" sz="1400" dirty="0">
+                <a:solidFill>
+                  <a:srgbClr val="262626"/>
+                </a:solidFill>
+              </a:rPr>
+              <a:t>, so a concurrent model has nothing to lower onto</a:t>
+            </a:r>
+            <a:endParaRPr lang="en-US" sz="1400" dirty="0"/>
+          </a:p>
+        </p:txBody>
+      </p:sp>
+      <p:sp>
+        <p:nvSpPr>
+          <p:cNvPr id="6" name="Shape 6"/>
+          <p:cNvSpPr/>
+          <p:nvPr/>
+        </p:nvSpPr>
+        <p:spPr>
+          <a:xfrm>
+            <a:off x="6263640" y="1517904"/>
+            <a:ext cx="5212080" cy="512064"/>
+          </a:xfrm>
+          <a:prstGeom prst="roundRect">
+            <a:avLst>
+              <a:gd name="adj" fmla="val 14000"/>
+            </a:avLst>
+          </a:prstGeom>
+          <a:solidFill>
+            <a:srgbClr val="00857C"/>
+          </a:solidFill>
+          <a:ln>
+            <a:noFill/>
+          </a:ln>
+        </p:spPr>
+        <p:txBody>
+          <a:bodyPr wrap="square" lIns="73152" tIns="36576" rIns="73152" bIns="36576" anchor="ctr" rtlCol="0">
+            <a:noAutofit/>
+          </a:bodyPr>
+          <a:lstStyle/>
+          <a:p>
+            <a:pPr algn="ctr"/>
+            <a:r>
+              <a:rPr lang="en-US" sz="1700" b="1" dirty="0">
+                <a:solidFill>
+                  <a:srgbClr val="FFFFFF"/>
+                </a:solidFill>
+              </a:rPr>
+              <a:t>What it buys</a:t>
+            </a:r>
+            <a:endParaRPr lang="en-US" sz="1700" dirty="0"/>
+          </a:p>
+        </p:txBody>
+      </p:sp>
+      <p:sp>
+        <p:nvSpPr>
+          <p:cNvPr id="7" name="Shape 7"/>
+          <p:cNvSpPr/>
+          <p:nvPr/>
+        </p:nvSpPr>
+        <p:spPr>
+          <a:xfrm>
+            <a:off x="6263640" y="2029968"/>
+            <a:ext cx="5212080" cy="3017520"/>
+          </a:xfrm>
+          <a:prstGeom prst="rect">
+            <a:avLst/>
+          </a:prstGeom>
+          <a:solidFill>
+            <a:srgbClr val="DCEFEC"/>
+          </a:solidFill>
+          <a:ln w="12700">
+            <a:solidFill>
+              <a:srgbClr val="9FD3CC"/>
+            </a:solidFill>
+          </a:ln>
+        </p:spPr>
+        <p:txBody>
+          <a:bodyPr wrap="square" lIns="73152" tIns="36576" rIns="73152" bIns="36576" anchor="ctr" rtlCol="0">
+            <a:noAutofit/>
+          </a:bodyPr>
+          <a:lstStyle/>
+          <a:p>
+            <a:r>
+              <a:rPr lang="en-US" sz="1000" dirty="0"/>
+              <a:t/>
+            </a:r>
+            <a:endParaRPr lang="en-US" sz="1000" dirty="0"/>
+          </a:p>
+        </p:txBody>
+      </p:sp>
+      <p:sp>
+        <p:nvSpPr>
+          <p:cNvPr id="8" name="TextBox 8"/>
+          <p:cNvSpPr txBox="1"/>
+          <p:nvPr/>
+        </p:nvSpPr>
+        <p:spPr>
+          <a:xfrm>
+            <a:off x="6574536" y="2212848"/>
+            <a:ext cx="4590288" cy="2651760"/>
+          </a:xfrm>
+          <a:prstGeom prst="rect">
+            <a:avLst/>
+          </a:prstGeom>
+          <a:noFill/>
+        </p:spPr>
+        <p:txBody>
+          <a:bodyPr wrap="square" lIns="0" tIns="0" rIns="0" bIns="0" anchor="t" rtlCol="0">
+            <a:noAutofit/>
+          </a:bodyPr>
+          <a:lstStyle/>
+          <a:p>
+            <a:pPr marL="237744" indent="-237744">
+              <a:spcBef>
+                <a:spcPts val="0"/>
+              </a:spcBef>
+              <a:buClr>
+                <a:srgbClr val="00857C"/>
+              </a:buClr>
+              <a:buSzPct val="70000"/>
+              <a:buFont typeface="Arial"/>
+              <a:buChar char="▪"/>
+            </a:pPr>
+            <a:r>
+              <a:rPr lang="en-US" sz="1400" b="1" dirty="0">
+                <a:solidFill>
+                  <a:srgbClr val="262626"/>
+                </a:solidFill>
+              </a:rPr>
+              <a:t>One source of truth</a:t>
+            </a:r>
+            <a:r>
+              <a:rPr lang="en-US" sz="1400" dirty="0">
+                <a:solidFill>
+                  <a:srgbClr val="262626"/>
+                </a:solidFill>
+              </a:rPr>
+              <a:t xml:space="preserve"> — simulation, generated C++ and the register map all come from the same Python</a:t>
+            </a:r>
+            <a:endParaRPr lang="en-US" sz="1400" dirty="0"/>
+          </a:p>
+          <a:p>
+            <a:pPr marL="237744" indent="-237744">
+              <a:spcBef>
+                <a:spcPts val="600"/>
+              </a:spcBef>
+              <a:buClr>
+                <a:srgbClr val="00857C"/>
+              </a:buClr>
+              <a:buSzPct val="70000"/>
+              <a:buFont typeface="Arial"/>
+              <a:buChar char="▪"/>
+            </a:pPr>
+            <a:r>
+              <a:rPr lang="en-US" sz="1400" dirty="0">
+                <a:solidFill>
+                  <a:srgbClr val="262626"/>
+                </a:solidFill>
+              </a:rPr>
+              <a:t xml:space="preserve">A model you can </a:t>
+            </a:r>
+            <a:r>
+              <a:rPr lang="en-US" sz="1400" b="1" dirty="0">
+                <a:solidFill>
+                  <a:srgbClr val="262626"/>
+                </a:solidFill>
+              </a:rPr>
+              <a:t>explore in seconds</a:t>
+            </a:r>
+            <a:r>
+              <a:rPr lang="en-US" sz="1400" dirty="0">
+                <a:solidFill>
+                  <a:srgbClr val="262626"/>
+                </a:solidFill>
+              </a:rPr>
+              <a:t>, instead of minutes of synthesis per idea</a:t>
+            </a:r>
+            <a:endParaRPr lang="en-US" sz="1400" dirty="0"/>
+          </a:p>
+          <a:p>
+            <a:pPr marL="237744" indent="-237744">
+              <a:spcBef>
+                <a:spcPts val="600"/>
+              </a:spcBef>
+              <a:buClr>
+                <a:srgbClr val="00857C"/>
+              </a:buClr>
+              <a:buSzPct val="70000"/>
+              <a:buFont typeface="Arial"/>
+              <a:buChar char="▪"/>
+            </a:pPr>
+            <a:r>
+              <a:rPr lang="en-US" sz="1400" dirty="0">
+                <a:solidFill>
+                  <a:srgbClr val="262626"/>
+                </a:solidFill>
+              </a:rPr>
+              <a:t xml:space="preserve">The build </a:t>
+            </a:r>
+            <a:r>
+              <a:rPr lang="en-US" sz="1400" b="1" dirty="0">
+                <a:solidFill>
+                  <a:srgbClr val="262626"/>
+                </a:solidFill>
+              </a:rPr>
+              <a:t>checks itself</a:t>
+            </a:r>
+            <a:r>
+              <a:rPr lang="en-US" sz="1400" dirty="0">
+                <a:solidFill>
+                  <a:srgbClr val="262626"/>
+                </a:solidFill>
+              </a:rPr>
+              <a:t>: the Python result is the golden the C-simulation is graded against</a:t>
+            </a:r>
+            <a:endParaRPr lang="en-US" sz="1400" dirty="0"/>
+          </a:p>
+          <a:p>
+            <a:pPr marL="237744" indent="-237744">
+              <a:spcBef>
+                <a:spcPts val="600"/>
+              </a:spcBef>
+              <a:buClr>
+                <a:srgbClr val="00857C"/>
+              </a:buClr>
+              <a:buSzPct val="70000"/>
+              <a:buFont typeface="Arial"/>
+              <a:buChar char="▪"/>
+            </a:pPr>
+            <a:r>
+              <a:rPr lang="en-US" sz="1400" dirty="0">
+                <a:solidFill>
+                  <a:srgbClr val="262626"/>
+                </a:solidFill>
+              </a:rPr>
+              <a:t xml:space="preserve">Timing you can </a:t>
+            </a:r>
+            <a:r>
+              <a:rPr lang="en-US" sz="1400" b="1" dirty="0">
+                <a:solidFill>
+                  <a:srgbClr val="262626"/>
+                </a:solidFill>
+              </a:rPr>
+              <a:t>trust before synthesis</a:t>
+            </a:r>
+            <a:r>
+              <a:rPr lang="en-US" sz="1400" dirty="0">
+                <a:solidFill>
+                  <a:srgbClr val="262626"/>
+                </a:solidFill>
+              </a:rPr>
+              <a:t>, because the estimate is checked against measured cycles</a:t>
+            </a:r>
+            <a:endParaRPr lang="en-US" sz="1400" dirty="0"/>
+          </a:p>
+        </p:txBody>
+      </p:sp>
+      <p:sp>
+        <p:nvSpPr>
+          <p:cNvPr id="9" name="Shape 9"/>
+          <p:cNvSpPr/>
+          <p:nvPr/>
+        </p:nvSpPr>
+        <p:spPr>
+          <a:xfrm>
+            <a:off x="685800" y="5138928"/>
+            <a:ext cx="10789920" cy="841248"/>
+          </a:xfrm>
+          <a:prstGeom prst="rect">
+            <a:avLst/>
+          </a:prstGeom>
+          <a:solidFill>
+            <a:srgbClr val="EEE6F3"/>
+          </a:solidFill>
+          <a:ln w="15875">
+            <a:solidFill>
+              <a:srgbClr val="57068C"/>
+            </a:solidFill>
+          </a:ln>
+        </p:spPr>
+        <p:txBody>
+          <a:bodyPr wrap="square" lIns="219456" tIns="109728" rIns="219456" bIns="109728" anchor="ctr" rtlCol="0">
+            <a:noAutofit/>
+          </a:bodyPr>
+          <a:lstStyle/>
+          <a:p>
+            <a:pPr algn="ctr"/>
+            <a:r>
+              <a:rPr lang="en-US" sz="1500" dirty="0">
+                <a:solidFill>
+                  <a:srgbClr val="262626"/>
+                </a:solidFill>
+              </a:rPr>
+              <a:t xml:space="preserve">For </a:t>
+            </a:r>
+            <a:r>
+              <a:rPr lang="en-US" sz="1500" dirty="0">
+                <a:solidFill>
+                  <a:srgbClr val="330662"/>
+                </a:solidFill>
+                <a:latin typeface="Consolas"/>
+                <a:cs typeface="Consolas"/>
+              </a:rPr>
+              <a:t>scalar_fun</a:t>
+            </a:r>
+            <a:r>
+              <a:rPr lang="en-US" sz="1500" dirty="0">
+                <a:solidFill>
+                  <a:srgbClr val="262626"/>
+                </a:solidFill>
+              </a:rPr>
+              <a:t xml:space="preserve">, </a:t>
+            </a:r>
+            <a:r>
+              <a:rPr lang="en-US" sz="1500" b="1" dirty="0">
+                <a:solidFill>
+                  <a:srgbClr val="262626"/>
+                </a:solidFill>
+              </a:rPr>
+              <a:t>nothing</a:t>
+            </a:r>
+            <a:r>
+              <a:rPr lang="en-US" sz="1500" dirty="0">
+                <a:solidFill>
+                  <a:srgbClr val="262626"/>
+                </a:solidFill>
+              </a:rPr>
+              <a:t xml:space="preserve"> — the kernel is four lines, and a model of it is pure overhead.</a:t>
+            </a:r>
+            <a:endParaRPr lang="en-US" sz="1500" dirty="0"/>
+          </a:p>
+          <a:p>
+            <a:pPr algn="ctr">
+              <a:spcBef>
+                <a:spcPts val="600"/>
+              </a:spcBef>
+            </a:pPr>
+            <a:r>
+              <a:rPr lang="en-US" sz="1400" b="1" dirty="0">
+                <a:solidFill>
+                  <a:srgbClr val="57068C"/>
+                </a:solidFill>
+              </a:rPr>
+              <a:t>The payoff starts when the algorithm is worth exploring before it is worth synthesizing.  sdrangan.github.io/waveflow</a:t>
+            </a:r>
+            <a:endParaRPr lang="en-US" sz="1400" dirty="0"/>
+          </a:p>
+        </p:txBody>
+      </p:sp>
+      <p:sp>
+        <p:nvSpPr>
+          <p:cNvPr id="10" name="Slide Number Placeholder 10"/>
+          <p:cNvSpPr>
+            <a:spLocks noGrp="1"/>
+          </p:cNvSpPr>
+          <p:nvPr>
+            <p:ph type="sldNum" sz="quarter" idx="12"/>
+          </p:nvPr>
+        </p:nvSpPr>
+        <p:spPr/>
+        <p:txBody>
+          <a:bodyPr/>
+          <a:lstStyle/>
+          <a:p>
+            <a:fld id="{629637A9-119A-49DA-BD12-AAC58B377D80}" type="slidenum">
+              <a:rPr lang="en-US" smtClean="0"/>
+              <a:t>‹#›</a:t>
+            </a:fld>
+            <a:endParaRPr lang="en-US" dirty="0"/>
+          </a:p>
+        </p:txBody>
+      </p:sp>
+    </p:spTree>
+  </p:cSld>
+  <p:clrMapOvr>
+    <a:masterClrMapping/>
+  </p:clrMapOvr>
+</p:sld>
+</file>
+
 <file path=ppt/slides/slide7.xml><?xml version="1.0" encoding="utf-8"?>
 <p:sld xmlns:a="http://schemas.openxmlformats.org/drawingml/2006/main" xmlns:r="http://schemas.openxmlformats.org/officeDocument/2006/relationships" xmlns:p="http://schemas.openxmlformats.org/presentationml/2006/main">
   <p:cSld>
